--- a/ゲーム科2年/00_前期/ゲームエンジンⅢ/バージョン管理/08_gitignoreファイル.pptx
+++ b/ゲーム科2年/00_前期/ゲームエンジンⅢ/バージョン管理/08_gitignoreファイル.pptx
@@ -266,7 +266,7 @@
           <a:p>
             <a:fld id="{E9CC885B-4903-4D54-9A93-00025F12DED9}" type="datetimeFigureOut">
               <a:rPr kumimoji="1" lang="ja-JP" altLang="en-US" smtClean="0"/>
-              <a:t>2025/1/16</a:t>
+              <a:t>2025/1/17</a:t>
             </a:fld>
             <a:endParaRPr kumimoji="1" lang="ja-JP" altLang="en-US"/>
           </a:p>
@@ -496,7 +496,7 @@
           <a:p>
             <a:fld id="{E9CC885B-4903-4D54-9A93-00025F12DED9}" type="datetimeFigureOut">
               <a:rPr kumimoji="1" lang="ja-JP" altLang="en-US" smtClean="0"/>
-              <a:t>2025/1/16</a:t>
+              <a:t>2025/1/17</a:t>
             </a:fld>
             <a:endParaRPr kumimoji="1" lang="ja-JP" altLang="en-US"/>
           </a:p>
@@ -736,7 +736,7 @@
           <a:p>
             <a:fld id="{E9CC885B-4903-4D54-9A93-00025F12DED9}" type="datetimeFigureOut">
               <a:rPr kumimoji="1" lang="ja-JP" altLang="en-US" smtClean="0"/>
-              <a:t>2025/1/16</a:t>
+              <a:t>2025/1/17</a:t>
             </a:fld>
             <a:endParaRPr kumimoji="1" lang="ja-JP" altLang="en-US"/>
           </a:p>
@@ -966,7 +966,7 @@
           <a:p>
             <a:fld id="{E9CC885B-4903-4D54-9A93-00025F12DED9}" type="datetimeFigureOut">
               <a:rPr kumimoji="1" lang="ja-JP" altLang="en-US" smtClean="0"/>
-              <a:t>2025/1/16</a:t>
+              <a:t>2025/1/17</a:t>
             </a:fld>
             <a:endParaRPr kumimoji="1" lang="ja-JP" altLang="en-US"/>
           </a:p>
@@ -1241,7 +1241,7 @@
           <a:p>
             <a:fld id="{E9CC885B-4903-4D54-9A93-00025F12DED9}" type="datetimeFigureOut">
               <a:rPr kumimoji="1" lang="ja-JP" altLang="en-US" smtClean="0"/>
-              <a:t>2025/1/16</a:t>
+              <a:t>2025/1/17</a:t>
             </a:fld>
             <a:endParaRPr kumimoji="1" lang="ja-JP" altLang="en-US"/>
           </a:p>
@@ -1570,7 +1570,7 @@
           <a:p>
             <a:fld id="{E9CC885B-4903-4D54-9A93-00025F12DED9}" type="datetimeFigureOut">
               <a:rPr kumimoji="1" lang="ja-JP" altLang="en-US" smtClean="0"/>
-              <a:t>2025/1/16</a:t>
+              <a:t>2025/1/17</a:t>
             </a:fld>
             <a:endParaRPr kumimoji="1" lang="ja-JP" altLang="en-US"/>
           </a:p>
@@ -2046,7 +2046,7 @@
           <a:p>
             <a:fld id="{E9CC885B-4903-4D54-9A93-00025F12DED9}" type="datetimeFigureOut">
               <a:rPr kumimoji="1" lang="ja-JP" altLang="en-US" smtClean="0"/>
-              <a:t>2025/1/16</a:t>
+              <a:t>2025/1/17</a:t>
             </a:fld>
             <a:endParaRPr kumimoji="1" lang="ja-JP" altLang="en-US"/>
           </a:p>
@@ -2187,7 +2187,7 @@
           <a:p>
             <a:fld id="{E9CC885B-4903-4D54-9A93-00025F12DED9}" type="datetimeFigureOut">
               <a:rPr kumimoji="1" lang="ja-JP" altLang="en-US" smtClean="0"/>
-              <a:t>2025/1/16</a:t>
+              <a:t>2025/1/17</a:t>
             </a:fld>
             <a:endParaRPr kumimoji="1" lang="ja-JP" altLang="en-US"/>
           </a:p>
@@ -2300,7 +2300,7 @@
           <a:p>
             <a:fld id="{E9CC885B-4903-4D54-9A93-00025F12DED9}" type="datetimeFigureOut">
               <a:rPr kumimoji="1" lang="ja-JP" altLang="en-US" smtClean="0"/>
-              <a:t>2025/1/16</a:t>
+              <a:t>2025/1/17</a:t>
             </a:fld>
             <a:endParaRPr kumimoji="1" lang="ja-JP" altLang="en-US"/>
           </a:p>
@@ -2643,7 +2643,7 @@
           <a:p>
             <a:fld id="{E9CC885B-4903-4D54-9A93-00025F12DED9}" type="datetimeFigureOut">
               <a:rPr kumimoji="1" lang="ja-JP" altLang="en-US" smtClean="0"/>
-              <a:t>2025/1/16</a:t>
+              <a:t>2025/1/17</a:t>
             </a:fld>
             <a:endParaRPr kumimoji="1" lang="ja-JP" altLang="en-US"/>
           </a:p>
@@ -2931,7 +2931,7 @@
           <a:p>
             <a:fld id="{E9CC885B-4903-4D54-9A93-00025F12DED9}" type="datetimeFigureOut">
               <a:rPr kumimoji="1" lang="ja-JP" altLang="en-US" smtClean="0"/>
-              <a:t>2025/1/16</a:t>
+              <a:t>2025/1/17</a:t>
             </a:fld>
             <a:endParaRPr kumimoji="1" lang="ja-JP" altLang="en-US"/>
           </a:p>
@@ -3204,7 +3204,7 @@
           <a:p>
             <a:fld id="{E9CC885B-4903-4D54-9A93-00025F12DED9}" type="datetimeFigureOut">
               <a:rPr kumimoji="1" lang="ja-JP" altLang="en-US" smtClean="0"/>
-              <a:t>2025/1/16</a:t>
+              <a:t>2025/1/17</a:t>
             </a:fld>
             <a:endParaRPr kumimoji="1" lang="ja-JP" altLang="en-US"/>
           </a:p>
@@ -3679,7 +3679,7 @@
         <p:spPr>
           <a:xfrm>
             <a:off x="567542" y="1216429"/>
-            <a:ext cx="10649069" cy="4524315"/>
+            <a:ext cx="10956846" cy="4524315"/>
           </a:xfrm>
           <a:prstGeom prst="rect">
             <a:avLst/>
@@ -3827,7 +3827,7 @@
                   <a:srgbClr val="FF0000"/>
                 </a:solidFill>
               </a:rPr>
-              <a:t>個人で別々に所持しておきたいファイルは管理したくないです。</a:t>
+              <a:t>個人で別々に所持しておきたいファイルは基本的に管理したくないです。</a:t>
             </a:r>
             <a:endParaRPr lang="en-US" altLang="ja-JP" sz="2400" b="1" dirty="0">
               <a:solidFill>
@@ -4368,9 +4368,21 @@
           <a:p>
             <a:r>
               <a:rPr lang="ja-JP" altLang="en-US" sz="2400" dirty="0"/>
-              <a:t>追加したら大元のフォルダを右クリックしてコミット画面を出しましょう。</a:t>
-            </a:r>
-            <a:endParaRPr lang="en-US" altLang="ja-JP" sz="2400" dirty="0"/>
+              <a:t>追加したら大元のフォルダを右クリックして</a:t>
+            </a:r>
+            <a:r>
+              <a:rPr lang="ja-JP" altLang="en-US" sz="2400" b="1" dirty="0">
+                <a:solidFill>
+                  <a:srgbClr val="FF0000"/>
+                </a:solidFill>
+              </a:rPr>
+              <a:t>コミット画面を出しましょう。</a:t>
+            </a:r>
+            <a:endParaRPr lang="en-US" altLang="ja-JP" sz="2400" b="1" dirty="0">
+              <a:solidFill>
+                <a:srgbClr val="FF0000"/>
+              </a:solidFill>
+            </a:endParaRPr>
           </a:p>
         </p:txBody>
       </p:sp>
@@ -4812,8 +4824,8 @@
         </p:nvSpPr>
         <p:spPr>
           <a:xfrm>
-            <a:off x="4798796" y="4441243"/>
-            <a:ext cx="5655715" cy="707886"/>
+            <a:off x="4798796" y="3922299"/>
+            <a:ext cx="6083717" cy="1323439"/>
           </a:xfrm>
           <a:prstGeom prst="rect">
             <a:avLst/>
@@ -4851,7 +4863,21 @@
             </a:r>
             <a:r>
               <a:rPr lang="ja-JP" altLang="en-US" sz="2000" dirty="0"/>
-              <a:t>されているファイルは無視されません</a:t>
+              <a:t>されているファイルは無視されません。</a:t>
+            </a:r>
+            <a:endParaRPr lang="en-US" altLang="ja-JP" sz="2000" dirty="0"/>
+          </a:p>
+          <a:p>
+            <a:r>
+              <a:rPr lang="ja-JP" altLang="en-US" sz="2000" dirty="0"/>
+              <a:t>ファイルを直接右クリックしてコミットする場合も</a:t>
+            </a:r>
+            <a:endParaRPr lang="en-US" altLang="ja-JP" sz="2000" dirty="0"/>
+          </a:p>
+          <a:p>
+            <a:r>
+              <a:rPr lang="ja-JP" altLang="en-US" sz="2000" dirty="0"/>
+              <a:t>無視されません。</a:t>
             </a:r>
             <a:endParaRPr lang="en-US" altLang="ja-JP" sz="2000" dirty="0"/>
           </a:p>
@@ -5324,11 +5350,11 @@
           </a:p>
           <a:p>
             <a:r>
-              <a:rPr lang="ja-JP" altLang="en-US" sz="2400" dirty="0"/>
-              <a:t>リーダーは</a:t>
-            </a:r>
-            <a:r>
-              <a:rPr lang="en-US" altLang="ja-JP" sz="2400" dirty="0"/>
+              <a:rPr lang="ja-JP" altLang="en-US" sz="2400"/>
+              <a:t>リーダーは書き換えて</a:t>
+            </a:r>
+            <a:r>
+              <a:rPr lang="en-US" altLang="ja-JP" sz="2400"/>
               <a:t>Push</a:t>
             </a:r>
             <a:r>

--- a/ゲーム科2年/00_前期/ゲームエンジンⅢ/バージョン管理/08_gitignoreファイル.pptx
+++ b/ゲーム科2年/00_前期/ゲームエンジンⅢ/バージョン管理/08_gitignoreファイル.pptx
@@ -266,7 +266,7 @@
           <a:p>
             <a:fld id="{E9CC885B-4903-4D54-9A93-00025F12DED9}" type="datetimeFigureOut">
               <a:rPr kumimoji="1" lang="ja-JP" altLang="en-US" smtClean="0"/>
-              <a:t>2025/1/17</a:t>
+              <a:t>2025/1/27</a:t>
             </a:fld>
             <a:endParaRPr kumimoji="1" lang="ja-JP" altLang="en-US"/>
           </a:p>
@@ -496,7 +496,7 @@
           <a:p>
             <a:fld id="{E9CC885B-4903-4D54-9A93-00025F12DED9}" type="datetimeFigureOut">
               <a:rPr kumimoji="1" lang="ja-JP" altLang="en-US" smtClean="0"/>
-              <a:t>2025/1/17</a:t>
+              <a:t>2025/1/27</a:t>
             </a:fld>
             <a:endParaRPr kumimoji="1" lang="ja-JP" altLang="en-US"/>
           </a:p>
@@ -736,7 +736,7 @@
           <a:p>
             <a:fld id="{E9CC885B-4903-4D54-9A93-00025F12DED9}" type="datetimeFigureOut">
               <a:rPr kumimoji="1" lang="ja-JP" altLang="en-US" smtClean="0"/>
-              <a:t>2025/1/17</a:t>
+              <a:t>2025/1/27</a:t>
             </a:fld>
             <a:endParaRPr kumimoji="1" lang="ja-JP" altLang="en-US"/>
           </a:p>
@@ -966,7 +966,7 @@
           <a:p>
             <a:fld id="{E9CC885B-4903-4D54-9A93-00025F12DED9}" type="datetimeFigureOut">
               <a:rPr kumimoji="1" lang="ja-JP" altLang="en-US" smtClean="0"/>
-              <a:t>2025/1/17</a:t>
+              <a:t>2025/1/27</a:t>
             </a:fld>
             <a:endParaRPr kumimoji="1" lang="ja-JP" altLang="en-US"/>
           </a:p>
@@ -1241,7 +1241,7 @@
           <a:p>
             <a:fld id="{E9CC885B-4903-4D54-9A93-00025F12DED9}" type="datetimeFigureOut">
               <a:rPr kumimoji="1" lang="ja-JP" altLang="en-US" smtClean="0"/>
-              <a:t>2025/1/17</a:t>
+              <a:t>2025/1/27</a:t>
             </a:fld>
             <a:endParaRPr kumimoji="1" lang="ja-JP" altLang="en-US"/>
           </a:p>
@@ -1570,7 +1570,7 @@
           <a:p>
             <a:fld id="{E9CC885B-4903-4D54-9A93-00025F12DED9}" type="datetimeFigureOut">
               <a:rPr kumimoji="1" lang="ja-JP" altLang="en-US" smtClean="0"/>
-              <a:t>2025/1/17</a:t>
+              <a:t>2025/1/27</a:t>
             </a:fld>
             <a:endParaRPr kumimoji="1" lang="ja-JP" altLang="en-US"/>
           </a:p>
@@ -2046,7 +2046,7 @@
           <a:p>
             <a:fld id="{E9CC885B-4903-4D54-9A93-00025F12DED9}" type="datetimeFigureOut">
               <a:rPr kumimoji="1" lang="ja-JP" altLang="en-US" smtClean="0"/>
-              <a:t>2025/1/17</a:t>
+              <a:t>2025/1/27</a:t>
             </a:fld>
             <a:endParaRPr kumimoji="1" lang="ja-JP" altLang="en-US"/>
           </a:p>
@@ -2187,7 +2187,7 @@
           <a:p>
             <a:fld id="{E9CC885B-4903-4D54-9A93-00025F12DED9}" type="datetimeFigureOut">
               <a:rPr kumimoji="1" lang="ja-JP" altLang="en-US" smtClean="0"/>
-              <a:t>2025/1/17</a:t>
+              <a:t>2025/1/27</a:t>
             </a:fld>
             <a:endParaRPr kumimoji="1" lang="ja-JP" altLang="en-US"/>
           </a:p>
@@ -2300,7 +2300,7 @@
           <a:p>
             <a:fld id="{E9CC885B-4903-4D54-9A93-00025F12DED9}" type="datetimeFigureOut">
               <a:rPr kumimoji="1" lang="ja-JP" altLang="en-US" smtClean="0"/>
-              <a:t>2025/1/17</a:t>
+              <a:t>2025/1/27</a:t>
             </a:fld>
             <a:endParaRPr kumimoji="1" lang="ja-JP" altLang="en-US"/>
           </a:p>
@@ -2643,7 +2643,7 @@
           <a:p>
             <a:fld id="{E9CC885B-4903-4D54-9A93-00025F12DED9}" type="datetimeFigureOut">
               <a:rPr kumimoji="1" lang="ja-JP" altLang="en-US" smtClean="0"/>
-              <a:t>2025/1/17</a:t>
+              <a:t>2025/1/27</a:t>
             </a:fld>
             <a:endParaRPr kumimoji="1" lang="ja-JP" altLang="en-US"/>
           </a:p>
@@ -2931,7 +2931,7 @@
           <a:p>
             <a:fld id="{E9CC885B-4903-4D54-9A93-00025F12DED9}" type="datetimeFigureOut">
               <a:rPr kumimoji="1" lang="ja-JP" altLang="en-US" smtClean="0"/>
-              <a:t>2025/1/17</a:t>
+              <a:t>2025/1/27</a:t>
             </a:fld>
             <a:endParaRPr kumimoji="1" lang="ja-JP" altLang="en-US"/>
           </a:p>
@@ -3204,7 +3204,7 @@
           <a:p>
             <a:fld id="{E9CC885B-4903-4D54-9A93-00025F12DED9}" type="datetimeFigureOut">
               <a:rPr kumimoji="1" lang="ja-JP" altLang="en-US" smtClean="0"/>
-              <a:t>2025/1/17</a:t>
+              <a:t>2025/1/27</a:t>
             </a:fld>
             <a:endParaRPr kumimoji="1" lang="ja-JP" altLang="en-US"/>
           </a:p>
@@ -3813,7 +3813,7 @@
             </a:r>
             <a:r>
               <a:rPr lang="ja-JP" altLang="en-US" sz="2400" dirty="0"/>
-              <a:t>の設定データ（自動入力設定 背景色など）</a:t>
+              <a:t>の個人設定データ（自動入力設定 背景色など）</a:t>
             </a:r>
             <a:endParaRPr lang="en-US" altLang="ja-JP" sz="2400" dirty="0"/>
           </a:p>

--- a/ゲーム科2年/00_前期/ゲームエンジンⅢ/バージョン管理/08_gitignoreファイル.pptx
+++ b/ゲーム科2年/00_前期/ゲームエンジンⅢ/バージョン管理/08_gitignoreファイル.pptx
@@ -266,7 +266,7 @@
           <a:p>
             <a:fld id="{E9CC885B-4903-4D54-9A93-00025F12DED9}" type="datetimeFigureOut">
               <a:rPr kumimoji="1" lang="ja-JP" altLang="en-US" smtClean="0"/>
-              <a:t>2025/1/27</a:t>
+              <a:t>2025/2/27</a:t>
             </a:fld>
             <a:endParaRPr kumimoji="1" lang="ja-JP" altLang="en-US"/>
           </a:p>
@@ -496,7 +496,7 @@
           <a:p>
             <a:fld id="{E9CC885B-4903-4D54-9A93-00025F12DED9}" type="datetimeFigureOut">
               <a:rPr kumimoji="1" lang="ja-JP" altLang="en-US" smtClean="0"/>
-              <a:t>2025/1/27</a:t>
+              <a:t>2025/2/27</a:t>
             </a:fld>
             <a:endParaRPr kumimoji="1" lang="ja-JP" altLang="en-US"/>
           </a:p>
@@ -736,7 +736,7 @@
           <a:p>
             <a:fld id="{E9CC885B-4903-4D54-9A93-00025F12DED9}" type="datetimeFigureOut">
               <a:rPr kumimoji="1" lang="ja-JP" altLang="en-US" smtClean="0"/>
-              <a:t>2025/1/27</a:t>
+              <a:t>2025/2/27</a:t>
             </a:fld>
             <a:endParaRPr kumimoji="1" lang="ja-JP" altLang="en-US"/>
           </a:p>
@@ -966,7 +966,7 @@
           <a:p>
             <a:fld id="{E9CC885B-4903-4D54-9A93-00025F12DED9}" type="datetimeFigureOut">
               <a:rPr kumimoji="1" lang="ja-JP" altLang="en-US" smtClean="0"/>
-              <a:t>2025/1/27</a:t>
+              <a:t>2025/2/27</a:t>
             </a:fld>
             <a:endParaRPr kumimoji="1" lang="ja-JP" altLang="en-US"/>
           </a:p>
@@ -1241,7 +1241,7 @@
           <a:p>
             <a:fld id="{E9CC885B-4903-4D54-9A93-00025F12DED9}" type="datetimeFigureOut">
               <a:rPr kumimoji="1" lang="ja-JP" altLang="en-US" smtClean="0"/>
-              <a:t>2025/1/27</a:t>
+              <a:t>2025/2/27</a:t>
             </a:fld>
             <a:endParaRPr kumimoji="1" lang="ja-JP" altLang="en-US"/>
           </a:p>
@@ -1570,7 +1570,7 @@
           <a:p>
             <a:fld id="{E9CC885B-4903-4D54-9A93-00025F12DED9}" type="datetimeFigureOut">
               <a:rPr kumimoji="1" lang="ja-JP" altLang="en-US" smtClean="0"/>
-              <a:t>2025/1/27</a:t>
+              <a:t>2025/2/27</a:t>
             </a:fld>
             <a:endParaRPr kumimoji="1" lang="ja-JP" altLang="en-US"/>
           </a:p>
@@ -2046,7 +2046,7 @@
           <a:p>
             <a:fld id="{E9CC885B-4903-4D54-9A93-00025F12DED9}" type="datetimeFigureOut">
               <a:rPr kumimoji="1" lang="ja-JP" altLang="en-US" smtClean="0"/>
-              <a:t>2025/1/27</a:t>
+              <a:t>2025/2/27</a:t>
             </a:fld>
             <a:endParaRPr kumimoji="1" lang="ja-JP" altLang="en-US"/>
           </a:p>
@@ -2187,7 +2187,7 @@
           <a:p>
             <a:fld id="{E9CC885B-4903-4D54-9A93-00025F12DED9}" type="datetimeFigureOut">
               <a:rPr kumimoji="1" lang="ja-JP" altLang="en-US" smtClean="0"/>
-              <a:t>2025/1/27</a:t>
+              <a:t>2025/2/27</a:t>
             </a:fld>
             <a:endParaRPr kumimoji="1" lang="ja-JP" altLang="en-US"/>
           </a:p>
@@ -2300,7 +2300,7 @@
           <a:p>
             <a:fld id="{E9CC885B-4903-4D54-9A93-00025F12DED9}" type="datetimeFigureOut">
               <a:rPr kumimoji="1" lang="ja-JP" altLang="en-US" smtClean="0"/>
-              <a:t>2025/1/27</a:t>
+              <a:t>2025/2/27</a:t>
             </a:fld>
             <a:endParaRPr kumimoji="1" lang="ja-JP" altLang="en-US"/>
           </a:p>
@@ -2643,7 +2643,7 @@
           <a:p>
             <a:fld id="{E9CC885B-4903-4D54-9A93-00025F12DED9}" type="datetimeFigureOut">
               <a:rPr kumimoji="1" lang="ja-JP" altLang="en-US" smtClean="0"/>
-              <a:t>2025/1/27</a:t>
+              <a:t>2025/2/27</a:t>
             </a:fld>
             <a:endParaRPr kumimoji="1" lang="ja-JP" altLang="en-US"/>
           </a:p>
@@ -2931,7 +2931,7 @@
           <a:p>
             <a:fld id="{E9CC885B-4903-4D54-9A93-00025F12DED9}" type="datetimeFigureOut">
               <a:rPr kumimoji="1" lang="ja-JP" altLang="en-US" smtClean="0"/>
-              <a:t>2025/1/27</a:t>
+              <a:t>2025/2/27</a:t>
             </a:fld>
             <a:endParaRPr kumimoji="1" lang="ja-JP" altLang="en-US"/>
           </a:p>
@@ -3204,7 +3204,7 @@
           <a:p>
             <a:fld id="{E9CC885B-4903-4D54-9A93-00025F12DED9}" type="datetimeFigureOut">
               <a:rPr kumimoji="1" lang="ja-JP" altLang="en-US" smtClean="0"/>
-              <a:t>2025/1/27</a:t>
+              <a:t>2025/2/27</a:t>
             </a:fld>
             <a:endParaRPr kumimoji="1" lang="ja-JP" altLang="en-US"/>
           </a:p>
@@ -3813,7 +3813,7 @@
             </a:r>
             <a:r>
               <a:rPr lang="ja-JP" altLang="en-US" sz="2400" dirty="0"/>
-              <a:t>の個人設定データ（自動入力設定 背景色など）</a:t>
+              <a:t>の設定データ（自動入力設定 背景色など）</a:t>
             </a:r>
             <a:endParaRPr lang="en-US" altLang="ja-JP" sz="2400" dirty="0"/>
           </a:p>
@@ -4368,7 +4368,7 @@
           <a:p>
             <a:r>
               <a:rPr lang="ja-JP" altLang="en-US" sz="2400" dirty="0"/>
-              <a:t>追加したら大元のフォルダを右クリックして</a:t>
+              <a:t>追加したら元のフォルダを右クリックして</a:t>
             </a:r>
             <a:r>
               <a:rPr lang="ja-JP" altLang="en-US" sz="2400" b="1" dirty="0">
@@ -4431,7 +4431,7 @@
         <p:spPr>
           <a:xfrm>
             <a:off x="567541" y="5375088"/>
-            <a:ext cx="5109091" cy="461665"/>
+            <a:ext cx="5724644" cy="461665"/>
           </a:xfrm>
           <a:prstGeom prst="rect">
             <a:avLst/>
@@ -4458,7 +4458,7 @@
                   <a:srgbClr val="FF0000"/>
                 </a:solidFill>
               </a:rPr>
-              <a:t>コミットはしないでください！！</a:t>
+              <a:t>まだコミットはしないでください！！</a:t>
             </a:r>
             <a:endParaRPr lang="en-US" altLang="ja-JP" sz="2400" b="1" dirty="0">
               <a:solidFill>
